--- a/Final_Presentation.pptx
+++ b/Final_Presentation.pptx
@@ -9353,7 +9353,7 @@
                           </a:solidFill>
                           <a:latin typeface="Calibri"/>
                         </a:rPr>
-                        <a:t>0.329</a:t>
+                        <a:t>0.413</a:t>
                       </a:r>
                     </a:p>
                   </a:txBody>
@@ -9376,7 +9376,7 @@
                           </a:solidFill>
                           <a:latin typeface="Calibri"/>
                         </a:rPr>
-                        <a:t>+0.572</a:t>
+                        <a:t>+0.488</a:t>
                       </a:r>
                     </a:p>
                   </a:txBody>
@@ -9447,7 +9447,7 @@
                           </a:solidFill>
                           <a:latin typeface="Calibri"/>
                         </a:rPr>
-                        <a:t>0.716</a:t>
+                        <a:t>0.676</a:t>
                       </a:r>
                     </a:p>
                   </a:txBody>
@@ -9470,7 +9470,7 @@
                           </a:solidFill>
                           <a:latin typeface="Calibri"/>
                         </a:rPr>
-                        <a:t>+0.027</a:t>
+                        <a:t>+0.068</a:t>
                       </a:r>
                     </a:p>
                   </a:txBody>
@@ -9541,7 +9541,7 @@
                           </a:solidFill>
                           <a:latin typeface="Calibri"/>
                         </a:rPr>
-                        <a:t>0.451</a:t>
+                        <a:t>0.513</a:t>
                       </a:r>
                     </a:p>
                   </a:txBody>
@@ -9564,7 +9564,7 @@
                           </a:solidFill>
                           <a:latin typeface="Calibri"/>
                         </a:rPr>
-                        <a:t>+0.364</a:t>
+                        <a:t>+0.302</a:t>
                       </a:r>
                     </a:p>
                   </a:txBody>
@@ -9635,7 +9635,7 @@
                           </a:solidFill>
                           <a:latin typeface="Calibri"/>
                         </a:rPr>
-                        <a:t>0.9382</a:t>
+                        <a:t>0.9395</a:t>
                       </a:r>
                     </a:p>
                   </a:txBody>
@@ -9658,7 +9658,7 @@
                           </a:solidFill>
                           <a:latin typeface="Calibri"/>
                         </a:rPr>
-                        <a:t>+0.0410</a:t>
+                        <a:t>+0.0396</a:t>
                       </a:r>
                     </a:p>
                   </a:txBody>
@@ -9729,7 +9729,7 @@
                           </a:solidFill>
                           <a:latin typeface="Calibri"/>
                         </a:rPr>
-                        <a:t>0.4922</a:t>
+                        <a:t>0.4677</a:t>
                       </a:r>
                     </a:p>
                   </a:txBody>
@@ -9752,7 +9752,7 @@
                           </a:solidFill>
                           <a:latin typeface="Calibri"/>
                         </a:rPr>
-                        <a:t>+0.3408</a:t>
+                        <a:t>+0.3652</a:t>
                       </a:r>
                     </a:p>
                   </a:txBody>
@@ -9917,7 +9917,7 @@
                           </a:solidFill>
                           <a:latin typeface="Calibri"/>
                         </a:rPr>
-                        <a:t>46.1 s</a:t>
+                        <a:t>96.8 s</a:t>
                       </a:r>
                     </a:p>
                   </a:txBody>
@@ -10364,7 +10364,7 @@
                 </a:solidFill>
                 <a:latin typeface="Calibri"/>
               </a:rPr>
-              <a:t>Autoencoder — FP=108,  FN=21,  TP=53</a:t>
+              <a:t>Autoencoder — FP=71,  FN=24,  TP=50</a:t>
             </a:r>
           </a:p>
         </p:txBody>
@@ -10411,7 +10411,7 @@
                 </a:solidFill>
                 <a:latin typeface="Calibri"/>
               </a:rPr>
-              <a:t>• Autoencoder catches 53 frauds at the cost of 108 false alarms — 18× more noise for the operations team.</a:t>
+              <a:t>• Autoencoder catches 50 frauds at the cost of 71 false alarms — 12× more noise for the operations team.</a:t>
             </a:r>
           </a:p>
           <a:p>
